--- a/Lectures/temporal drift and domain shift.pptx
+++ b/Lectures/temporal drift and domain shift.pptx
@@ -7131,7 +7131,7 @@
           <a:bodyPr/>
           <a:lstStyle/>
           <a:p>
-            <a:endParaRPr lang="en-US"/>
+            <a:endParaRPr lang="en-US" dirty="0"/>
           </a:p>
         </p:txBody>
       </p:sp>
@@ -15402,6 +15402,58 @@
           <a:xfrm>
             <a:off x="0" y="4835236"/>
             <a:ext cx="5846618" cy="1808386"/>
+          </a:xfrm>
+          <a:prstGeom prst="rect">
+            <a:avLst/>
+          </a:prstGeom>
+          <a:noFill/>
+          <a:ln w="57150">
+            <a:solidFill>
+              <a:srgbClr val="FF0000"/>
+            </a:solidFill>
+          </a:ln>
+        </p:spPr>
+        <p:style>
+          <a:lnRef idx="2">
+            <a:schemeClr val="accent1">
+              <a:shade val="15000"/>
+            </a:schemeClr>
+          </a:lnRef>
+          <a:fillRef idx="1">
+            <a:schemeClr val="accent1"/>
+          </a:fillRef>
+          <a:effectRef idx="0">
+            <a:schemeClr val="accent1"/>
+          </a:effectRef>
+          <a:fontRef idx="minor">
+            <a:schemeClr val="lt1"/>
+          </a:fontRef>
+        </p:style>
+        <p:txBody>
+          <a:bodyPr rtlCol="0" anchor="ctr"/>
+          <a:lstStyle/>
+          <a:p>
+            <a:pPr algn="ctr"/>
+            <a:endParaRPr lang="en-US"/>
+          </a:p>
+        </p:txBody>
+      </p:sp>
+      <p:sp>
+        <p:nvSpPr>
+          <p:cNvPr id="6" name="Rectangle 5">
+            <a:extLst>
+              <a:ext uri="{FF2B5EF4-FFF2-40B4-BE49-F238E27FC236}">
+                <a16:creationId xmlns:a16="http://schemas.microsoft.com/office/drawing/2014/main" id="{350744E6-4AFC-42B1-0F72-5670E4A19CC2}"/>
+              </a:ext>
+            </a:extLst>
+          </p:cNvPr>
+          <p:cNvSpPr/>
+          <p:nvPr/>
+        </p:nvSpPr>
+        <p:spPr>
+          <a:xfrm>
+            <a:off x="3057646" y="214278"/>
+            <a:ext cx="2614246" cy="1808386"/>
           </a:xfrm>
           <a:prstGeom prst="rect">
             <a:avLst/>

--- a/Lectures/temporal drift and domain shift.pptx
+++ b/Lectures/temporal drift and domain shift.pptx
@@ -15070,19 +15070,33 @@
             </a:pPr>
             <a:r>
               <a:rPr lang="en-US" dirty="0"/>
-              <a:t>Blog post: https://</a:t>
+              <a:t>Blog post: </a:t>
             </a:r>
             <a:r>
-              <a:rPr lang="en-US" dirty="0" err="1"/>
-              <a:t>huyenchip.com</a:t>
+              <a:rPr lang="en-US" dirty="0">
+                <a:hlinkClick r:id="rId4"/>
+              </a:rPr>
+              <a:t>https://huyenchip.com/2022/02/07/data-distribution-shifts-and-monitoring.html</a:t>
+            </a:r>
+            <a:endParaRPr lang="en-US" dirty="0"/>
+          </a:p>
+          <a:p>
+            <a:pPr marL="76200" indent="0">
+              <a:buNone/>
+            </a:pPr>
+            <a:endParaRPr lang="en-US" dirty="0"/>
+          </a:p>
+          <a:p>
+            <a:pPr marL="76200" indent="0">
+              <a:buNone/>
+            </a:pPr>
+            <a:r>
+              <a:rPr lang="en-US" dirty="0"/>
+              <a:t>Other packages in slides for </a:t>
             </a:r>
             <a:r>
-              <a:rPr lang="en-US" dirty="0"/>
-              <a:t>/2022/02/07/data-distribution-shifts-and-</a:t>
-            </a:r>
-            <a:r>
-              <a:rPr lang="en-US" dirty="0" err="1"/>
-              <a:t>monitoring.html</a:t>
+              <a:rPr lang="en-US"/>
+              <a:t>drift monitoring</a:t>
             </a:r>
             <a:endParaRPr lang="en-US" dirty="0"/>
           </a:p>
